--- a/assets/figures-editable/c1-c2/c1-e27.pptx
+++ b/assets/figures-editable/c1-c2/c1-e27.pptx
@@ -7,7 +7,7 @@
   <p:sldIdLst>
     <p:sldId id="256" r:id="rId7"/>
   </p:sldIdLst>
-  <p:sldSz cx="11948160" cy="7924799" type="screen4x3"/>
+  <p:sldSz cx="12191695" cy="6858000" type="screen4x3"/>
   <p:notesSz cx="6858000" cy="9144000"/>
   <p:defaultTextStyle>
     <a:defPPr>
@@ -3098,14 +3098,14 @@
       <p:grpSpPr/>
       <p:sp>
         <p:nvSpPr>
-          <p:cNvPr id="2" name="text1" descr="sci-ppt:C1-E27-001"/>
+          <p:cNvPr id="2" name="C1-E27 text 0" descr="sci-ppt:o000"/>
           <p:cNvSpPr txBox="1"/>
           <p:nvPr/>
         </p:nvSpPr>
         <p:spPr>
           <a:xfrm>
-            <a:off x="316992" y="268224"/>
-            <a:ext cx="11277600" cy="359054"/>
+            <a:off x="274320" y="118872"/>
+            <a:ext cx="11612880" cy="340105"/>
           </a:xfrm>
           <a:prstGeom prst="rect">
             <a:avLst/>
@@ -3114,7 +3114,7 @@
           <a:effectLst/>
         </p:spPr>
         <p:txBody>
-          <a:bodyPr wrap="none" lIns="27432" rIns="27432" tIns="18288" bIns="18288" anchor="ctr">
+          <a:bodyPr wrap="none" lIns="18288" rIns="18288" tIns="18288" bIns="18288" anchor="t">
             <a:spAutoFit/>
           </a:bodyPr>
           <a:lstStyle/>
@@ -3125,67 +3125,37 @@
               </a:spcAft>
             </a:pPr>
             <a:r>
-              <a:rPr sz="1823" b="0" i="0">
+              <a:rPr sz="1900" b="1" i="0">
                 <a:solidFill>
                   <a:srgbClr val="8EDBD4"/>
                 </a:solidFill>
                 <a:latin typeface="Arial"/>
               </a:rPr>
-              <a:t>C1-E27 | Physical-variable diagram</a:t>
-            </a:r>
-          </a:p>
-        </p:txBody>
-      </p:sp>
-      <p:sp>
-        <p:nvSpPr>
-          <p:cNvPr id="3" name="rect2" descr="sci-ppt:C1-E27-002"/>
+              <a:t>C1-E27 · Bulk conservation and Newtonian constitutive assumption</a:t>
+            </a:r>
+          </a:p>
+        </p:txBody>
+      </p:sp>
+      <p:sp>
+        <p:nvSpPr>
+          <p:cNvPr id="3" name="C1-E27 round_rect 1" descr="sci-ppt:o001"/>
           <p:cNvSpPr/>
           <p:nvPr/>
         </p:nvSpPr>
         <p:spPr>
           <a:xfrm>
-            <a:off x="1341120" y="1524000"/>
-            <a:ext cx="9144000" cy="2438400"/>
-          </a:xfrm>
-          <a:prstGeom prst="rect">
-            <a:avLst/>
-          </a:prstGeom>
-          <a:noFill/>
-          <a:ln w="19050">
-            <a:solidFill>
-              <a:srgbClr val="B4C7D2"/>
-            </a:solidFill>
-          </a:ln>
-          <a:effectLst/>
-        </p:spPr>
-        <p:txBody>
-          <a:bodyPr rtlCol="0" anchor="ctr"/>
-          <a:lstStyle/>
-          <a:p>
-            <a:pPr algn="ctr"/>
-          </a:p>
-        </p:txBody>
-      </p:sp>
-      <p:sp>
-        <p:nvSpPr>
-          <p:cNvPr id="4" name="ellipse3" descr="sci-ppt:C1-E27-003"/>
-          <p:cNvSpPr/>
-          <p:nvPr/>
-        </p:nvSpPr>
-        <p:spPr>
-          <a:xfrm>
-            <a:off x="2682240" y="1950720"/>
-            <a:ext cx="1584960" cy="1584960"/>
-          </a:xfrm>
-          <a:prstGeom prst="ellipse">
+            <a:off x="365760" y="914400"/>
+            <a:ext cx="3840480" cy="4937760"/>
+          </a:xfrm>
+          <a:prstGeom prst="roundRect">
             <a:avLst/>
           </a:prstGeom>
           <a:solidFill>
             <a:srgbClr val="213E4B"/>
           </a:solidFill>
-          <a:ln w="21590">
+          <a:ln w="20320">
             <a:solidFill>
-              <a:srgbClr val="B4C7D2"/>
+              <a:srgbClr val="8EDBD4"/>
             </a:solidFill>
           </a:ln>
           <a:effectLst/>
@@ -3198,21 +3168,93 @@
           </a:p>
         </p:txBody>
       </p:sp>
+      <p:sp>
+        <p:nvSpPr>
+          <p:cNvPr id="4" name="C1-E27 text 2" descr="sci-ppt:o002"/>
+          <p:cNvSpPr txBox="1"/>
+          <p:nvPr/>
+        </p:nvSpPr>
+        <p:spPr>
+          <a:xfrm>
+            <a:off x="475488" y="969264"/>
+            <a:ext cx="3621024" cy="254889"/>
+          </a:xfrm>
+          <a:prstGeom prst="rect">
+            <a:avLst/>
+          </a:prstGeom>
+          <a:noFill/>
+          <a:effectLst/>
+        </p:spPr>
+        <p:txBody>
+          <a:bodyPr wrap="none" lIns="18288" rIns="18288" tIns="18288" bIns="18288" anchor="t">
+            <a:spAutoFit/>
+          </a:bodyPr>
+          <a:lstStyle/>
+          <a:p>
+            <a:pPr algn="l">
+              <a:spcAft>
+                <a:spcPts val="0"/>
+              </a:spcAft>
+            </a:pPr>
+            <a:r>
+              <a:rPr sz="1350" b="1" i="0">
+                <a:solidFill>
+                  <a:srgbClr val="8EDBD4"/>
+                </a:solidFill>
+                <a:latin typeface="Arial"/>
+              </a:rPr>
+              <a:t>Continuity: ∇·u = 0</a:t>
+            </a:r>
+          </a:p>
+        </p:txBody>
+      </p:sp>
+      <p:sp>
+        <p:nvSpPr>
+          <p:cNvPr id="5" name="C1-E27 rect 3" descr="sci-ppt:o003"/>
+          <p:cNvSpPr/>
+          <p:nvPr/>
+        </p:nvSpPr>
+        <p:spPr>
+          <a:xfrm>
+            <a:off x="1280160" y="2286000"/>
+            <a:ext cx="2011680" cy="1554480"/>
+          </a:xfrm>
+          <a:prstGeom prst="rect">
+            <a:avLst/>
+          </a:prstGeom>
+          <a:solidFill>
+            <a:srgbClr val="1E4A5A"/>
+          </a:solidFill>
+          <a:ln w="25400">
+            <a:solidFill>
+              <a:srgbClr val="8EDBD4"/>
+            </a:solidFill>
+          </a:ln>
+          <a:effectLst/>
+        </p:spPr>
+        <p:txBody>
+          <a:bodyPr rtlCol="0" anchor="ctr"/>
+          <a:lstStyle/>
+          <a:p>
+            <a:pPr algn="ctr"/>
+          </a:p>
+        </p:txBody>
+      </p:sp>
       <p:cxnSp>
         <p:nvCxnSpPr>
-          <p:cNvPr id="5" name="arrow4" descr="sci-ppt:C1-E27-004"/>
+          <p:cNvPr id="6" name="C1-E27 arrow 4" descr="sci-ppt:o004"/>
           <p:cNvCxnSpPr/>
           <p:nvPr/>
         </p:nvCxnSpPr>
         <p:spPr>
           <a:xfrm>
-            <a:off x="4267200" y="2743200"/>
-            <a:ext cx="4023360" cy="0"/>
+            <a:off x="685800" y="2606040"/>
+            <a:ext cx="548640" cy="0"/>
           </a:xfrm>
           <a:prstGeom prst="line">
             <a:avLst/>
           </a:prstGeom>
-          <a:ln w="25400">
+          <a:ln w="33020">
             <a:solidFill>
               <a:srgbClr val="8EDBD4"/>
             </a:solidFill>
@@ -3222,16 +3264,136 @@
           <a:effectLst/>
         </p:spPr>
       </p:cxnSp>
-      <p:sp>
-        <p:nvSpPr>
-          <p:cNvPr id="6" name="text5" descr="sci-ppt:C1-E27-005"/>
+      <p:cxnSp>
+        <p:nvCxnSpPr>
+          <p:cNvPr id="7" name="C1-E27 arrow 5" descr="sci-ppt:o005"/>
+          <p:cNvCxnSpPr/>
+          <p:nvPr/>
+        </p:nvCxnSpPr>
+        <p:spPr>
+          <a:xfrm>
+            <a:off x="3337560" y="2606040"/>
+            <a:ext cx="548640" cy="0"/>
+          </a:xfrm>
+          <a:prstGeom prst="line">
+            <a:avLst/>
+          </a:prstGeom>
+          <a:ln w="33020">
+            <a:solidFill>
+              <a:srgbClr val="8EDBD4"/>
+            </a:solidFill>
+            <a:headEnd type="none" w="med" len="med"/>
+            <a:tailEnd type="triangle" w="med" len="med"/>
+          </a:ln>
+          <a:effectLst/>
+        </p:spPr>
+      </p:cxnSp>
+      <p:cxnSp>
+        <p:nvCxnSpPr>
+          <p:cNvPr id="8" name="C1-E27 arrow 6" descr="sci-ppt:o006"/>
+          <p:cNvCxnSpPr/>
+          <p:nvPr/>
+        </p:nvCxnSpPr>
+        <p:spPr>
+          <a:xfrm>
+            <a:off x="685800" y="3063240"/>
+            <a:ext cx="548640" cy="0"/>
+          </a:xfrm>
+          <a:prstGeom prst="line">
+            <a:avLst/>
+          </a:prstGeom>
+          <a:ln w="33020">
+            <a:solidFill>
+              <a:srgbClr val="8EDBD4"/>
+            </a:solidFill>
+            <a:headEnd type="none" w="med" len="med"/>
+            <a:tailEnd type="triangle" w="med" len="med"/>
+          </a:ln>
+          <a:effectLst/>
+        </p:spPr>
+      </p:cxnSp>
+      <p:cxnSp>
+        <p:nvCxnSpPr>
+          <p:cNvPr id="9" name="C1-E27 arrow 7" descr="sci-ppt:o007"/>
+          <p:cNvCxnSpPr/>
+          <p:nvPr/>
+        </p:nvCxnSpPr>
+        <p:spPr>
+          <a:xfrm>
+            <a:off x="3337560" y="3063240"/>
+            <a:ext cx="548640" cy="0"/>
+          </a:xfrm>
+          <a:prstGeom prst="line">
+            <a:avLst/>
+          </a:prstGeom>
+          <a:ln w="33020">
+            <a:solidFill>
+              <a:srgbClr val="8EDBD4"/>
+            </a:solidFill>
+            <a:headEnd type="none" w="med" len="med"/>
+            <a:tailEnd type="triangle" w="med" len="med"/>
+          </a:ln>
+          <a:effectLst/>
+        </p:spPr>
+      </p:cxnSp>
+      <p:cxnSp>
+        <p:nvCxnSpPr>
+          <p:cNvPr id="10" name="C1-E27 arrow 8" descr="sci-ppt:o008"/>
+          <p:cNvCxnSpPr/>
+          <p:nvPr/>
+        </p:nvCxnSpPr>
+        <p:spPr>
+          <a:xfrm>
+            <a:off x="685800" y="3520440"/>
+            <a:ext cx="548640" cy="0"/>
+          </a:xfrm>
+          <a:prstGeom prst="line">
+            <a:avLst/>
+          </a:prstGeom>
+          <a:ln w="33020">
+            <a:solidFill>
+              <a:srgbClr val="8EDBD4"/>
+            </a:solidFill>
+            <a:headEnd type="none" w="med" len="med"/>
+            <a:tailEnd type="triangle" w="med" len="med"/>
+          </a:ln>
+          <a:effectLst/>
+        </p:spPr>
+      </p:cxnSp>
+      <p:cxnSp>
+        <p:nvCxnSpPr>
+          <p:cNvPr id="11" name="C1-E27 arrow 9" descr="sci-ppt:o009"/>
+          <p:cNvCxnSpPr/>
+          <p:nvPr/>
+        </p:nvCxnSpPr>
+        <p:spPr>
+          <a:xfrm>
+            <a:off x="3337560" y="3520440"/>
+            <a:ext cx="548640" cy="0"/>
+          </a:xfrm>
+          <a:prstGeom prst="line">
+            <a:avLst/>
+          </a:prstGeom>
+          <a:ln w="33020">
+            <a:solidFill>
+              <a:srgbClr val="8EDBD4"/>
+            </a:solidFill>
+            <a:headEnd type="none" w="med" len="med"/>
+            <a:tailEnd type="triangle" w="med" len="med"/>
+          </a:ln>
+          <a:effectLst/>
+        </p:spPr>
+      </p:cxnSp>
+      <p:sp>
+        <p:nvSpPr>
+          <p:cNvPr id="12" name="C1-E27 text 10" descr="sci-ppt:o010"/>
           <p:cNvSpPr txBox="1"/>
           <p:nvPr/>
         </p:nvSpPr>
         <p:spPr>
           <a:xfrm>
-            <a:off x="5120640" y="2072640"/>
-            <a:ext cx="5364480" cy="396849"/>
+            <a:off x="1371600" y="2834640"/>
+            <a:ext cx="1828800" cy="448563"/>
           </a:xfrm>
           <a:prstGeom prst="rect">
             <a:avLst/>
@@ -3240,7 +3402,63 @@
           <a:effectLst/>
         </p:spPr>
         <p:txBody>
-          <a:bodyPr wrap="none" lIns="27432" rIns="27432" tIns="18288" bIns="18288" anchor="ctr">
+          <a:bodyPr wrap="none" lIns="18288" rIns="18288" tIns="18288" bIns="18288" anchor="t">
+            <a:spAutoFit/>
+          </a:bodyPr>
+          <a:lstStyle/>
+          <a:p>
+            <a:pPr algn="ctr">
+              <a:spcAft>
+                <a:spcPts val="0"/>
+              </a:spcAft>
+            </a:pPr>
+            <a:r>
+              <a:rPr sz="1300" b="1" i="0">
+                <a:solidFill>
+                  <a:srgbClr val="E7F0F3"/>
+                </a:solidFill>
+                <a:latin typeface="Arial"/>
+              </a:rPr>
+              <a:t>volume in</a:t>
+            </a:r>
+          </a:p>
+          <a:p>
+            <a:pPr algn="ctr">
+              <a:spcAft>
+                <a:spcPts val="0"/>
+              </a:spcAft>
+            </a:pPr>
+            <a:r>
+              <a:rPr sz="1300" b="1" i="0">
+                <a:solidFill>
+                  <a:srgbClr val="E7F0F3"/>
+                </a:solidFill>
+                <a:latin typeface="Arial"/>
+              </a:rPr>
+              <a:t>= volume out</a:t>
+            </a:r>
+          </a:p>
+        </p:txBody>
+      </p:sp>
+      <p:sp>
+        <p:nvSpPr>
+          <p:cNvPr id="13" name="C1-E27 text 11" descr="sci-ppt:o011"/>
+          <p:cNvSpPr txBox="1"/>
+          <p:nvPr/>
+        </p:nvSpPr>
+        <p:spPr>
+          <a:xfrm>
+            <a:off x="502920" y="4251960"/>
+            <a:ext cx="3566160" cy="626745"/>
+          </a:xfrm>
+          <a:prstGeom prst="rect">
+            <a:avLst/>
+          </a:prstGeom>
+          <a:noFill/>
+          <a:effectLst/>
+        </p:spPr>
+        <p:txBody>
+          <a:bodyPr wrap="none" lIns="18288" rIns="18288" tIns="18288" bIns="18288" anchor="t">
             <a:spAutoFit/>
           </a:bodyPr>
           <a:lstStyle/>
@@ -3251,27 +3469,91 @@
               </a:spcAft>
             </a:pPr>
             <a:r>
-              <a:rPr sz="2016" b="0" i="0">
+              <a:rPr sz="1250" b="0" i="0">
                 <a:solidFill>
                   <a:srgbClr val="E7F0F3"/>
                 </a:solidFill>
                 <a:latin typeface="Arial"/>
               </a:rPr>
-              <a:t>Liquid u(x,t), p(x,t)</a:t>
-            </a:r>
-          </a:p>
-        </p:txBody>
-      </p:sp>
-      <p:sp>
-        <p:nvSpPr>
-          <p:cNvPr id="7" name="text6" descr="sci-ppt:C1-E27-006"/>
+              <a:t>The liquid does not compress: whatever</a:t>
+            </a:r>
+          </a:p>
+          <a:p>
+            <a:pPr algn="l">
+              <a:spcAft>
+                <a:spcPts val="0"/>
+              </a:spcAft>
+            </a:pPr>
+            <a:r>
+              <a:rPr sz="1250" b="0" i="0">
+                <a:solidFill>
+                  <a:srgbClr val="E7F0F3"/>
+                </a:solidFill>
+                <a:latin typeface="Arial"/>
+              </a:rPr>
+              <a:t>flows into a region flows out, so a moving</a:t>
+            </a:r>
+          </a:p>
+          <a:p>
+            <a:pPr algn="l">
+              <a:spcAft>
+                <a:spcPts val="0"/>
+              </a:spcAft>
+            </a:pPr>
+            <a:r>
+              <a:rPr sz="1250" b="0" i="0">
+                <a:solidFill>
+                  <a:srgbClr val="E7F0F3"/>
+                </a:solidFill>
+                <a:latin typeface="Arial"/>
+              </a:rPr>
+              <a:t>bubble wall must push liquid outward.</a:t>
+            </a:r>
+          </a:p>
+        </p:txBody>
+      </p:sp>
+      <p:sp>
+        <p:nvSpPr>
+          <p:cNvPr id="14" name="C1-E27 round_rect 12" descr="sci-ppt:o012"/>
+          <p:cNvSpPr/>
+          <p:nvPr/>
+        </p:nvSpPr>
+        <p:spPr>
+          <a:xfrm>
+            <a:off x="4480560" y="914400"/>
+            <a:ext cx="7360920" cy="4937760"/>
+          </a:xfrm>
+          <a:prstGeom prst="roundRect">
+            <a:avLst/>
+          </a:prstGeom>
+          <a:solidFill>
+            <a:srgbClr val="213E4B"/>
+          </a:solidFill>
+          <a:ln w="20320">
+            <a:solidFill>
+              <a:srgbClr val="8EDBD4"/>
+            </a:solidFill>
+          </a:ln>
+          <a:effectLst/>
+        </p:spPr>
+        <p:txBody>
+          <a:bodyPr rtlCol="0" anchor="ctr"/>
+          <a:lstStyle/>
+          <a:p>
+            <a:pPr algn="ctr"/>
+          </a:p>
+        </p:txBody>
+      </p:sp>
+      <p:sp>
+        <p:nvSpPr>
+          <p:cNvPr id="15" name="C1-E27 text 13" descr="sci-ppt:o013"/>
           <p:cNvSpPr txBox="1"/>
           <p:nvPr/>
         </p:nvSpPr>
         <p:spPr>
           <a:xfrm>
-            <a:off x="7680960" y="3413760"/>
-            <a:ext cx="1950720" cy="359054"/>
+            <a:off x="4590288" y="969264"/>
+            <a:ext cx="7141464" cy="254889"/>
           </a:xfrm>
           <a:prstGeom prst="rect">
             <a:avLst/>
@@ -3280,7 +3562,7 @@
           <a:effectLst/>
         </p:spPr>
         <p:txBody>
-          <a:bodyPr wrap="none" lIns="27432" rIns="27432" tIns="18288" bIns="18288" anchor="ctr">
+          <a:bodyPr wrap="none" lIns="18288" rIns="18288" tIns="18288" bIns="18288" anchor="t">
             <a:spAutoFit/>
           </a:bodyPr>
           <a:lstStyle/>
@@ -3291,27 +3573,307 @@
               </a:spcAft>
             </a:pPr>
             <a:r>
-              <a:rPr sz="1823" b="0" i="0">
+              <a:rPr sz="1350" b="1" i="0">
+                <a:solidFill>
+                  <a:srgbClr val="8EDBD4"/>
+                </a:solidFill>
+                <a:latin typeface="Arial"/>
+              </a:rPr>
+              <a:t>Momentum: ρ Du/Dt = −∇p + μ∇²u</a:t>
+            </a:r>
+          </a:p>
+        </p:txBody>
+      </p:sp>
+      <p:cxnSp>
+        <p:nvCxnSpPr>
+          <p:cNvPr id="16" name="C1-E27 arrow 14" descr="sci-ppt:o014"/>
+          <p:cNvCxnSpPr/>
+          <p:nvPr/>
+        </p:nvCxnSpPr>
+        <p:spPr>
+          <a:xfrm flipV="1">
+            <a:off x="5394960" y="3474720"/>
+            <a:ext cx="2743200" cy="914400"/>
+          </a:xfrm>
+          <a:prstGeom prst="line">
+            <a:avLst/>
+          </a:prstGeom>
+          <a:ln w="44450">
+            <a:solidFill>
+              <a:srgbClr val="8EDBD4"/>
+            </a:solidFill>
+            <a:headEnd type="none" w="med" len="med"/>
+            <a:tailEnd type="triangle" w="med" len="med"/>
+          </a:ln>
+          <a:effectLst/>
+        </p:spPr>
+      </p:cxnSp>
+      <p:cxnSp>
+        <p:nvCxnSpPr>
+          <p:cNvPr id="17" name="C1-E27 arrow 15" descr="sci-ppt:o015"/>
+          <p:cNvCxnSpPr/>
+          <p:nvPr/>
+        </p:nvCxnSpPr>
+        <p:spPr>
+          <a:xfrm>
+            <a:off x="5394960" y="4389120"/>
+            <a:ext cx="2743200" cy="0"/>
+          </a:xfrm>
+          <a:prstGeom prst="line">
+            <a:avLst/>
+          </a:prstGeom>
+          <a:ln w="38100">
+            <a:solidFill>
+              <a:srgbClr val="F28BA0"/>
+            </a:solidFill>
+            <a:headEnd type="none" w="med" len="med"/>
+            <a:tailEnd type="triangle" w="med" len="med"/>
+          </a:ln>
+          <a:effectLst/>
+        </p:spPr>
+      </p:cxnSp>
+      <p:cxnSp>
+        <p:nvCxnSpPr>
+          <p:cNvPr id="18" name="C1-E27 arrow 16" descr="sci-ppt:o016"/>
+          <p:cNvCxnSpPr/>
+          <p:nvPr/>
+        </p:nvCxnSpPr>
+        <p:spPr>
+          <a:xfrm flipV="1">
+            <a:off x="8138160" y="3474720"/>
+            <a:ext cx="0" cy="914400"/>
+          </a:xfrm>
+          <a:prstGeom prst="line">
+            <a:avLst/>
+          </a:prstGeom>
+          <a:ln w="38100">
+            <a:solidFill>
+              <a:srgbClr val="7FC8F8"/>
+            </a:solidFill>
+            <a:headEnd type="none" w="med" len="med"/>
+            <a:tailEnd type="triangle" w="med" len="med"/>
+          </a:ln>
+          <a:effectLst/>
+        </p:spPr>
+      </p:cxnSp>
+      <p:sp>
+        <p:nvSpPr>
+          <p:cNvPr id="19" name="C1-E27 ellipse 17" descr="sci-ppt:o017"/>
+          <p:cNvSpPr/>
+          <p:nvPr/>
+        </p:nvSpPr>
+        <p:spPr>
+          <a:xfrm>
+            <a:off x="5321808" y="4315968"/>
+            <a:ext cx="146304" cy="146304"/>
+          </a:xfrm>
+          <a:prstGeom prst="ellipse">
+            <a:avLst/>
+          </a:prstGeom>
+          <a:solidFill>
+            <a:srgbClr val="E7F0F3"/>
+          </a:solidFill>
+          <a:ln w="12700">
+            <a:solidFill>
+              <a:srgbClr val="E7F0F3"/>
+            </a:solidFill>
+          </a:ln>
+          <a:effectLst/>
+        </p:spPr>
+        <p:txBody>
+          <a:bodyPr rtlCol="0" anchor="ctr"/>
+          <a:lstStyle/>
+          <a:p>
+            <a:pPr algn="ctr"/>
+          </a:p>
+        </p:txBody>
+      </p:sp>
+      <p:sp>
+        <p:nvSpPr>
+          <p:cNvPr id="20" name="C1-E27 text 18" descr="sci-ppt:o018"/>
+          <p:cNvSpPr txBox="1"/>
+          <p:nvPr/>
+        </p:nvSpPr>
+        <p:spPr>
+          <a:xfrm>
+            <a:off x="8275320" y="3108960"/>
+            <a:ext cx="3291840" cy="247142"/>
+          </a:xfrm>
+          <a:prstGeom prst="rect">
+            <a:avLst/>
+          </a:prstGeom>
+          <a:noFill/>
+          <a:effectLst/>
+        </p:spPr>
+        <p:txBody>
+          <a:bodyPr wrap="none" lIns="18288" rIns="18288" tIns="18288" bIns="18288" anchor="t">
+            <a:spAutoFit/>
+          </a:bodyPr>
+          <a:lstStyle/>
+          <a:p>
+            <a:pPr algn="l">
+              <a:spcAft>
+                <a:spcPts val="0"/>
+              </a:spcAft>
+            </a:pPr>
+            <a:r>
+              <a:rPr sz="1300" b="1" i="0">
+                <a:solidFill>
+                  <a:srgbClr val="8EDBD4"/>
+                </a:solidFill>
+                <a:latin typeface="Arial"/>
+              </a:rPr>
+              <a:t>ρ Du/Dt (inertia)</a:t>
+            </a:r>
+          </a:p>
+        </p:txBody>
+      </p:sp>
+      <p:sp>
+        <p:nvSpPr>
+          <p:cNvPr id="21" name="C1-E27 text 19" descr="sci-ppt:o019"/>
+          <p:cNvSpPr txBox="1"/>
+          <p:nvPr/>
+        </p:nvSpPr>
+        <p:spPr>
+          <a:xfrm>
+            <a:off x="6309360" y="4462272"/>
+            <a:ext cx="2743200" cy="247142"/>
+          </a:xfrm>
+          <a:prstGeom prst="rect">
+            <a:avLst/>
+          </a:prstGeom>
+          <a:noFill/>
+          <a:effectLst/>
+        </p:spPr>
+        <p:txBody>
+          <a:bodyPr wrap="none" lIns="18288" rIns="18288" tIns="18288" bIns="18288" anchor="t">
+            <a:spAutoFit/>
+          </a:bodyPr>
+          <a:lstStyle/>
+          <a:p>
+            <a:pPr algn="l">
+              <a:spcAft>
+                <a:spcPts val="0"/>
+              </a:spcAft>
+            </a:pPr>
+            <a:r>
+              <a:rPr sz="1300" b="1" i="0">
+                <a:solidFill>
+                  <a:srgbClr val="F28BA0"/>
+                </a:solidFill>
+                <a:latin typeface="Arial"/>
+              </a:rPr>
+              <a:t>−∇p (pressure gradient)</a:t>
+            </a:r>
+          </a:p>
+        </p:txBody>
+      </p:sp>
+      <p:sp>
+        <p:nvSpPr>
+          <p:cNvPr id="22" name="C1-E27 text 20" descr="sci-ppt:o020"/>
+          <p:cNvSpPr txBox="1"/>
+          <p:nvPr/>
+        </p:nvSpPr>
+        <p:spPr>
+          <a:xfrm>
+            <a:off x="8275320" y="3840480"/>
+            <a:ext cx="3291840" cy="247142"/>
+          </a:xfrm>
+          <a:prstGeom prst="rect">
+            <a:avLst/>
+          </a:prstGeom>
+          <a:noFill/>
+          <a:effectLst/>
+        </p:spPr>
+        <p:txBody>
+          <a:bodyPr wrap="none" lIns="18288" rIns="18288" tIns="18288" bIns="18288" anchor="t">
+            <a:spAutoFit/>
+          </a:bodyPr>
+          <a:lstStyle/>
+          <a:p>
+            <a:pPr algn="l">
+              <a:spcAft>
+                <a:spcPts val="0"/>
+              </a:spcAft>
+            </a:pPr>
+            <a:r>
+              <a:rPr sz="1300" b="1" i="0">
+                <a:solidFill>
+                  <a:srgbClr val="7FC8F8"/>
+                </a:solidFill>
+                <a:latin typeface="Arial"/>
+              </a:rPr>
+              <a:t>μ∇²u (viscous diffusion)</a:t>
+            </a:r>
+          </a:p>
+        </p:txBody>
+      </p:sp>
+      <p:sp>
+        <p:nvSpPr>
+          <p:cNvPr id="23" name="C1-E27 text 21" descr="sci-ppt:o021"/>
+          <p:cNvSpPr txBox="1"/>
+          <p:nvPr/>
+        </p:nvSpPr>
+        <p:spPr>
+          <a:xfrm>
+            <a:off x="4663440" y="1371600"/>
+            <a:ext cx="7040880" cy="448563"/>
+          </a:xfrm>
+          <a:prstGeom prst="rect">
+            <a:avLst/>
+          </a:prstGeom>
+          <a:noFill/>
+          <a:effectLst/>
+        </p:spPr>
+        <p:txBody>
+          <a:bodyPr wrap="none" lIns="18288" rIns="18288" tIns="18288" bIns="18288" anchor="t">
+            <a:spAutoFit/>
+          </a:bodyPr>
+          <a:lstStyle/>
+          <a:p>
+            <a:pPr algn="l">
+              <a:spcAft>
+                <a:spcPts val="0"/>
+              </a:spcAft>
+            </a:pPr>
+            <a:r>
+              <a:rPr sz="1300" b="0" i="0">
                 <a:solidFill>
                   <a:srgbClr val="E7F0F3"/>
                 </a:solidFill>
                 <a:latin typeface="Arial"/>
               </a:rPr>
-              <a:t>Outlet</a:t>
-            </a:r>
-          </a:p>
-        </p:txBody>
-      </p:sp>
-      <p:sp>
-        <p:nvSpPr>
-          <p:cNvPr id="8" name="text7" descr="sci-ppt:C1-E27-007"/>
+              <a:t>Per unit volume, the mass-times-acceleration vector equals the sum of the</a:t>
+            </a:r>
+          </a:p>
+          <a:p>
+            <a:pPr algn="l">
+              <a:spcAft>
+                <a:spcPts val="0"/>
+              </a:spcAft>
+            </a:pPr>
+            <a:r>
+              <a:rPr sz="1300" b="0" i="0">
+                <a:solidFill>
+                  <a:srgbClr val="E7F0F3"/>
+                </a:solidFill>
+                <a:latin typeface="Arial"/>
+              </a:rPr>
+              <a:t>forces:</a:t>
+            </a:r>
+          </a:p>
+        </p:txBody>
+      </p:sp>
+      <p:sp>
+        <p:nvSpPr>
+          <p:cNvPr id="24" name="C1-E27 text 22" descr="sci-ppt:o022"/>
           <p:cNvSpPr txBox="1"/>
           <p:nvPr/>
         </p:nvSpPr>
         <p:spPr>
           <a:xfrm>
-            <a:off x="1584960" y="4206240"/>
-            <a:ext cx="9753600" cy="359054"/>
+            <a:off x="4663440" y="1874519"/>
+            <a:ext cx="7040880" cy="626745"/>
           </a:xfrm>
           <a:prstGeom prst="rect">
             <a:avLst/>
@@ -3320,7 +3882,7 @@
           <a:effectLst/>
         </p:spPr>
         <p:txBody>
-          <a:bodyPr wrap="none" lIns="27432" rIns="27432" tIns="18288" bIns="18288" anchor="ctr">
+          <a:bodyPr wrap="none" lIns="18288" rIns="18288" tIns="18288" bIns="18288" anchor="t">
             <a:spAutoFit/>
           </a:bodyPr>
           <a:lstStyle/>
@@ -3331,27 +3893,59 @@
               </a:spcAft>
             </a:pPr>
             <a:r>
-              <a:rPr sz="1823" b="0" i="0">
+              <a:rPr sz="1250" b="0" i="0">
                 <a:solidFill>
-                  <a:srgbClr val="E7F0F3"/>
+                  <a:srgbClr val="B4C7D2"/>
                 </a:solidFill>
                 <a:latin typeface="Arial"/>
               </a:rPr>
-              <a:t>Moving interface Gamma; spatial field required.</a:t>
-            </a:r>
-          </a:p>
-        </p:txBody>
-      </p:sp>
-      <p:sp>
-        <p:nvSpPr>
-          <p:cNvPr id="9" name="text8" descr="sci-ppt:C1-E27-008"/>
+              <a:t>The same fixed set of equations governs every later spatial calculation: the</a:t>
+            </a:r>
+          </a:p>
+          <a:p>
+            <a:pPr algn="l">
+              <a:spcAft>
+                <a:spcPts val="0"/>
+              </a:spcAft>
+            </a:pPr>
+            <a:r>
+              <a:rPr sz="1250" b="0" i="0">
+                <a:solidFill>
+                  <a:srgbClr val="B4C7D2"/>
+                </a:solidFill>
+                <a:latin typeface="Arial"/>
+              </a:rPr>
+              <a:t>pressure field supplies the push, the viscous term damps it, and the convective</a:t>
+            </a:r>
+          </a:p>
+          <a:p>
+            <a:pPr algn="l">
+              <a:spcAft>
+                <a:spcPts val="0"/>
+              </a:spcAft>
+            </a:pPr>
+            <a:r>
+              <a:rPr sz="1250" b="0" i="0">
+                <a:solidFill>
+                  <a:srgbClr val="B4C7D2"/>
+                </a:solidFill>
+                <a:latin typeface="Arial"/>
+              </a:rPr>
+              <a:t>part u·∇u makes the flow nonlinear.</a:t>
+            </a:r>
+          </a:p>
+        </p:txBody>
+      </p:sp>
+      <p:sp>
+        <p:nvSpPr>
+          <p:cNvPr id="25" name="C1-E27 text 23" descr="sci-ppt:o023"/>
           <p:cNvSpPr txBox="1"/>
           <p:nvPr/>
         </p:nvSpPr>
         <p:spPr>
           <a:xfrm>
-            <a:off x="365760" y="4974336"/>
-            <a:ext cx="5547360" cy="321259"/>
+            <a:off x="4663440" y="2834640"/>
+            <a:ext cx="7040880" cy="262636"/>
           </a:xfrm>
           <a:prstGeom prst="rect">
             <a:avLst/>
@@ -3360,7 +3954,7 @@
           <a:effectLst/>
         </p:spPr>
         <p:txBody>
-          <a:bodyPr wrap="none" lIns="27432" rIns="27432" tIns="18288" bIns="18288" anchor="ctr">
+          <a:bodyPr wrap="none" lIns="18288" rIns="18288" tIns="18288" bIns="18288" anchor="t">
             <a:spAutoFit/>
           </a:bodyPr>
           <a:lstStyle/>
@@ -3371,27 +3965,27 @@
               </a:spcAft>
             </a:pPr>
             <a:r>
-              <a:rPr sz="1632" b="0" i="0">
+              <a:rPr sz="1400" b="1" i="0">
                 <a:solidFill>
-                  <a:srgbClr val="E7F0F3"/>
+                  <a:srgbClr val="F2B880"/>
                 </a:solidFill>
                 <a:latin typeface="Arial"/>
               </a:rPr>
-              <a:t>Liquid domain x</a:t>
-            </a:r>
-          </a:p>
-        </p:txBody>
-      </p:sp>
-      <p:sp>
-        <p:nvSpPr>
-          <p:cNvPr id="10" name="text9" descr="sci-ppt:C1-E27-009"/>
+              <a:t>Du/Dt = ∂u/∂t + (u·∇)u</a:t>
+            </a:r>
+          </a:p>
+        </p:txBody>
+      </p:sp>
+      <p:sp>
+        <p:nvSpPr>
+          <p:cNvPr id="26" name="C1-E27 text 24" descr="sci-ppt:o024"/>
           <p:cNvSpPr txBox="1"/>
           <p:nvPr/>
         </p:nvSpPr>
         <p:spPr>
           <a:xfrm>
-            <a:off x="365760" y="5266944"/>
-            <a:ext cx="5547360" cy="321259"/>
+            <a:off x="320040" y="6510528"/>
+            <a:ext cx="11521440" cy="200660"/>
           </a:xfrm>
           <a:prstGeom prst="rect">
             <a:avLst/>
@@ -3400,7 +3994,7 @@
           <a:effectLst/>
         </p:spPr>
         <p:txBody>
-          <a:bodyPr wrap="none" lIns="27432" rIns="27432" tIns="18288" bIns="18288" anchor="ctr">
+          <a:bodyPr wrap="none" lIns="18288" rIns="18288" tIns="18288" bIns="18288" anchor="t">
             <a:spAutoFit/>
           </a:bodyPr>
           <a:lstStyle/>
@@ -3411,293 +4005,13 @@
               </a:spcAft>
             </a:pPr>
             <a:r>
-              <a:rPr sz="1632" b="0" i="0">
-                <a:solidFill>
-                  <a:srgbClr val="E7F0F3"/>
-                </a:solidFill>
-                <a:latin typeface="Arial"/>
-              </a:rPr>
-              <a:t>p(x,t)</a:t>
-            </a:r>
-          </a:p>
-        </p:txBody>
-      </p:sp>
-      <p:sp>
-        <p:nvSpPr>
-          <p:cNvPr id="11" name="text10" descr="sci-ppt:C1-E27-010"/>
-          <p:cNvSpPr txBox="1"/>
-          <p:nvPr/>
-        </p:nvSpPr>
-        <p:spPr>
-          <a:xfrm>
-            <a:off x="365760" y="5559552"/>
-            <a:ext cx="5547360" cy="321259"/>
-          </a:xfrm>
-          <a:prstGeom prst="rect">
-            <a:avLst/>
-          </a:prstGeom>
-          <a:noFill/>
-          <a:effectLst/>
-        </p:spPr>
-        <p:txBody>
-          <a:bodyPr wrap="none" lIns="27432" rIns="27432" tIns="18288" bIns="18288" anchor="ctr">
-            <a:spAutoFit/>
-          </a:bodyPr>
-          <a:lstStyle/>
-          <a:p>
-            <a:pPr algn="l">
-              <a:spcAft>
-                <a:spcPts val="0"/>
-              </a:spcAft>
-            </a:pPr>
-            <a:r>
-              <a:rPr sz="1632" b="0" i="0">
-                <a:solidFill>
-                  <a:srgbClr val="E7F0F3"/>
-                </a:solidFill>
-                <a:latin typeface="Arial"/>
-              </a:rPr>
-              <a:t>μ</a:t>
-            </a:r>
-          </a:p>
-        </p:txBody>
-      </p:sp>
-      <p:sp>
-        <p:nvSpPr>
-          <p:cNvPr id="12" name="text11" descr="sci-ppt:C1-E27-011"/>
-          <p:cNvSpPr txBox="1"/>
-          <p:nvPr/>
-        </p:nvSpPr>
-        <p:spPr>
-          <a:xfrm>
-            <a:off x="365760" y="5852160"/>
-            <a:ext cx="5547360" cy="321259"/>
-          </a:xfrm>
-          <a:prstGeom prst="rect">
-            <a:avLst/>
-          </a:prstGeom>
-          <a:noFill/>
-          <a:effectLst/>
-        </p:spPr>
-        <p:txBody>
-          <a:bodyPr wrap="none" lIns="27432" rIns="27432" tIns="18288" bIns="18288" anchor="ctr">
-            <a:spAutoFit/>
-          </a:bodyPr>
-          <a:lstStyle/>
-          <a:p>
-            <a:pPr algn="l">
-              <a:spcAft>
-                <a:spcPts val="0"/>
-              </a:spcAft>
-            </a:pPr>
-            <a:r>
-              <a:rPr sz="1632" b="0" i="0">
-                <a:solidFill>
-                  <a:srgbClr val="E7F0F3"/>
-                </a:solidFill>
-                <a:latin typeface="Arial"/>
-              </a:rPr>
-              <a:t>Moving Γ</a:t>
-            </a:r>
-          </a:p>
-        </p:txBody>
-      </p:sp>
-      <p:sp>
-        <p:nvSpPr>
-          <p:cNvPr id="13" name="text12" descr="sci-ppt:C1-E27-012"/>
-          <p:cNvSpPr txBox="1"/>
-          <p:nvPr/>
-        </p:nvSpPr>
-        <p:spPr>
-          <a:xfrm>
-            <a:off x="6156960" y="4974336"/>
-            <a:ext cx="5547360" cy="321259"/>
-          </a:xfrm>
-          <a:prstGeom prst="rect">
-            <a:avLst/>
-          </a:prstGeom>
-          <a:noFill/>
-          <a:effectLst/>
-        </p:spPr>
-        <p:txBody>
-          <a:bodyPr wrap="none" lIns="27432" rIns="27432" tIns="18288" bIns="18288" anchor="ctr">
-            <a:spAutoFit/>
-          </a:bodyPr>
-          <a:lstStyle/>
-          <a:p>
-            <a:pPr algn="l">
-              <a:spcAft>
-                <a:spcPts val="0"/>
-              </a:spcAft>
-            </a:pPr>
-            <a:r>
-              <a:rPr sz="1632" b="0" i="0">
-                <a:solidFill>
-                  <a:srgbClr val="E7F0F3"/>
-                </a:solidFill>
-                <a:latin typeface="Arial"/>
-              </a:rPr>
-              <a:t>u(x,t)</a:t>
-            </a:r>
-          </a:p>
-        </p:txBody>
-      </p:sp>
-      <p:sp>
-        <p:nvSpPr>
-          <p:cNvPr id="14" name="text13" descr="sci-ppt:C1-E27-013"/>
-          <p:cNvSpPr txBox="1"/>
-          <p:nvPr/>
-        </p:nvSpPr>
-        <p:spPr>
-          <a:xfrm>
-            <a:off x="6156960" y="5266944"/>
-            <a:ext cx="5547360" cy="321259"/>
-          </a:xfrm>
-          <a:prstGeom prst="rect">
-            <a:avLst/>
-          </a:prstGeom>
-          <a:noFill/>
-          <a:effectLst/>
-        </p:spPr>
-        <p:txBody>
-          <a:bodyPr wrap="none" lIns="27432" rIns="27432" tIns="18288" bIns="18288" anchor="ctr">
-            <a:spAutoFit/>
-          </a:bodyPr>
-          <a:lstStyle/>
-          <a:p>
-            <a:pPr algn="l">
-              <a:spcAft>
-                <a:spcPts val="0"/>
-              </a:spcAft>
-            </a:pPr>
-            <a:r>
-              <a:rPr sz="1632" b="0" i="0">
-                <a:solidFill>
-                  <a:srgbClr val="E7F0F3"/>
-                </a:solidFill>
-                <a:latin typeface="Arial"/>
-              </a:rPr>
-              <a:t>ρ</a:t>
-            </a:r>
-          </a:p>
-        </p:txBody>
-      </p:sp>
-      <p:sp>
-        <p:nvSpPr>
-          <p:cNvPr id="15" name="text14" descr="sci-ppt:C1-E27-014"/>
-          <p:cNvSpPr txBox="1"/>
-          <p:nvPr/>
-        </p:nvSpPr>
-        <p:spPr>
-          <a:xfrm>
-            <a:off x="6156960" y="5559552"/>
-            <a:ext cx="5547360" cy="321259"/>
-          </a:xfrm>
-          <a:prstGeom prst="rect">
-            <a:avLst/>
-          </a:prstGeom>
-          <a:noFill/>
-          <a:effectLst/>
-        </p:spPr>
-        <p:txBody>
-          <a:bodyPr wrap="none" lIns="27432" rIns="27432" tIns="18288" bIns="18288" anchor="ctr">
-            <a:spAutoFit/>
-          </a:bodyPr>
-          <a:lstStyle/>
-          <a:p>
-            <a:pPr algn="l">
-              <a:spcAft>
-                <a:spcPts val="0"/>
-              </a:spcAft>
-            </a:pPr>
-            <a:r>
-              <a:rPr sz="1632" b="0" i="0">
-                <a:solidFill>
-                  <a:srgbClr val="E7F0F3"/>
-                </a:solidFill>
-                <a:latin typeface="Arial"/>
-              </a:rPr>
-              <a:t>t</a:t>
-            </a:r>
-          </a:p>
-        </p:txBody>
-      </p:sp>
-      <p:sp>
-        <p:nvSpPr>
-          <p:cNvPr id="16" name="text15" descr="sci-ppt:C1-E27-015"/>
-          <p:cNvSpPr txBox="1"/>
-          <p:nvPr/>
-        </p:nvSpPr>
-        <p:spPr>
-          <a:xfrm>
-            <a:off x="6156960" y="5852160"/>
-            <a:ext cx="5547360" cy="321259"/>
-          </a:xfrm>
-          <a:prstGeom prst="rect">
-            <a:avLst/>
-          </a:prstGeom>
-          <a:noFill/>
-          <a:effectLst/>
-        </p:spPr>
-        <p:txBody>
-          <a:bodyPr wrap="none" lIns="27432" rIns="27432" tIns="18288" bIns="18288" anchor="ctr">
-            <a:spAutoFit/>
-          </a:bodyPr>
-          <a:lstStyle/>
-          <a:p>
-            <a:pPr algn="l">
-              <a:spcAft>
-                <a:spcPts val="0"/>
-              </a:spcAft>
-            </a:pPr>
-            <a:r>
-              <a:rPr sz="1632" b="0" i="0">
-                <a:solidFill>
-                  <a:srgbClr val="E7F0F3"/>
-                </a:solidFill>
-                <a:latin typeface="Arial"/>
-              </a:rPr>
-              <a:t>Outlet and wall</a:t>
-            </a:r>
-          </a:p>
-        </p:txBody>
-      </p:sp>
-      <p:sp>
-        <p:nvSpPr>
-          <p:cNvPr id="17" name="text16" descr="sci-ppt:C1-E27-016"/>
-          <p:cNvSpPr txBox="1"/>
-          <p:nvPr/>
-        </p:nvSpPr>
-        <p:spPr>
-          <a:xfrm>
-            <a:off x="365760" y="6339840"/>
-            <a:ext cx="11277600" cy="302361"/>
-          </a:xfrm>
-          <a:prstGeom prst="rect">
-            <a:avLst/>
-          </a:prstGeom>
-          <a:noFill/>
-          <a:effectLst/>
-        </p:spPr>
-        <p:txBody>
-          <a:bodyPr wrap="none" lIns="27432" rIns="27432" tIns="18288" bIns="18288" anchor="ctr">
-            <a:spAutoFit/>
-          </a:bodyPr>
-          <a:lstStyle/>
-          <a:p>
-            <a:pPr algn="l">
-              <a:spcAft>
-                <a:spcPts val="0"/>
-              </a:spcAft>
-            </a:pPr>
-            <a:r>
-              <a:rPr sz="1536" b="0" i="0">
+              <a:rPr sz="1000" b="0" i="0">
                 <a:solidFill>
                   <a:srgbClr val="B4C7D2"/>
                 </a:solidFill>
                 <a:latin typeface="Arial"/>
               </a:rPr>
-              <a:t>Resolve the spatial velocity and pressure, not only one radius</a:t>
+              <a:t>Vectors are schematic; constant ρ and μ.</a:t>
             </a:r>
           </a:p>
         </p:txBody>

--- a/assets/figures-editable/c1-c2/c1-e27.pptx
+++ b/assets/figures-editable/c1-c2/c1-e27.pptx
@@ -3131,7 +3131,7 @@
                 </a:solidFill>
                 <a:latin typeface="Arial"/>
               </a:rPr>
-              <a:t>C1-E27 · Bulk conservation and Newtonian constitutive assumption</a:t>
+              <a:t>C1-E27 · Kinematic condition and clean-interface traction</a:t>
             </a:r>
           </a:p>
         </p:txBody>
@@ -3145,7 +3145,7 @@
         <p:spPr>
           <a:xfrm>
             <a:off x="365760" y="914400"/>
-            <a:ext cx="3840480" cy="4937760"/>
+            <a:ext cx="4937760" cy="4937760"/>
           </a:xfrm>
           <a:prstGeom prst="roundRect">
             <a:avLst/>
@@ -3177,7 +3177,7 @@
         <p:spPr>
           <a:xfrm>
             <a:off x="475488" y="969264"/>
-            <a:ext cx="3621024" cy="254889"/>
+            <a:ext cx="4718304" cy="254889"/>
           </a:xfrm>
           <a:prstGeom prst="rect">
             <a:avLst/>
@@ -3203,31 +3203,31 @@
                 </a:solidFill>
                 <a:latin typeface="Arial"/>
               </a:rPr>
-              <a:t>Continuity: ∇·u = 0</a:t>
-            </a:r>
-          </a:p>
-        </p:txBody>
-      </p:sp>
-      <p:sp>
-        <p:nvSpPr>
-          <p:cNvPr id="5" name="C1-E27 rect 3" descr="sci-ppt:o003"/>
+              <a:t>Interface patch and conventions</a:t>
+            </a:r>
+          </a:p>
+        </p:txBody>
+      </p:sp>
+      <p:sp>
+        <p:nvSpPr>
+          <p:cNvPr id="5" name="C1-E27 ellipse 3" descr="sci-ppt:o003"/>
           <p:cNvSpPr/>
           <p:nvPr/>
         </p:nvSpPr>
         <p:spPr>
           <a:xfrm>
-            <a:off x="1280160" y="2286000"/>
-            <a:ext cx="2011680" cy="1554480"/>
-          </a:xfrm>
-          <a:prstGeom prst="rect">
+            <a:off x="1188719" y="1965960"/>
+            <a:ext cx="3108960" cy="3108960"/>
+          </a:xfrm>
+          <a:prstGeom prst="ellipse">
             <a:avLst/>
           </a:prstGeom>
           <a:solidFill>
             <a:srgbClr val="1E4A5A"/>
           </a:solidFill>
-          <a:ln w="25400">
+          <a:ln w="12700">
             <a:solidFill>
-              <a:srgbClr val="8EDBD4"/>
+              <a:srgbClr val="2B6678"/>
             </a:solidFill>
           </a:ln>
           <a:effectLst/>
@@ -3240,30 +3240,38 @@
           </a:p>
         </p:txBody>
       </p:sp>
-      <p:cxnSp>
-        <p:nvCxnSpPr>
-          <p:cNvPr id="6" name="C1-E27 arrow 4" descr="sci-ppt:o004"/>
-          <p:cNvCxnSpPr/>
+      <p:sp>
+        <p:nvSpPr>
+          <p:cNvPr id="6" name="C1-E27 ellipse 4" descr="sci-ppt:o004"/>
+          <p:cNvSpPr/>
           <p:nvPr/>
-        </p:nvCxnSpPr>
-        <p:spPr>
-          <a:xfrm>
-            <a:off x="685800" y="2606040"/>
-            <a:ext cx="548640" cy="0"/>
-          </a:xfrm>
-          <a:prstGeom prst="line">
+        </p:nvSpPr>
+        <p:spPr>
+          <a:xfrm>
+            <a:off x="1554480" y="2331720"/>
+            <a:ext cx="2377440" cy="2377440"/>
+          </a:xfrm>
+          <a:prstGeom prst="ellipse">
             <a:avLst/>
           </a:prstGeom>
-          <a:ln w="33020">
+          <a:solidFill>
+            <a:srgbClr val="0C1820"/>
+          </a:solidFill>
+          <a:ln w="27940">
             <a:solidFill>
-              <a:srgbClr val="8EDBD4"/>
+              <a:srgbClr val="F2B880"/>
             </a:solidFill>
-            <a:headEnd type="none" w="med" len="med"/>
-            <a:tailEnd type="triangle" w="med" len="med"/>
           </a:ln>
           <a:effectLst/>
         </p:spPr>
-      </p:cxnSp>
+        <p:txBody>
+          <a:bodyPr rtlCol="0" anchor="ctr"/>
+          <a:lstStyle/>
+          <a:p>
+            <a:pPr algn="ctr"/>
+          </a:p>
+        </p:txBody>
+      </p:sp>
       <p:cxnSp>
         <p:nvCxnSpPr>
           <p:cNvPr id="7" name="C1-E27 arrow 5" descr="sci-ppt:o005"/>
@@ -3271,353 +3279,9 @@
           <p:nvPr/>
         </p:nvCxnSpPr>
         <p:spPr>
-          <a:xfrm>
-            <a:off x="3337560" y="2606040"/>
-            <a:ext cx="548640" cy="0"/>
-          </a:xfrm>
-          <a:prstGeom prst="line">
-            <a:avLst/>
-          </a:prstGeom>
-          <a:ln w="33020">
-            <a:solidFill>
-              <a:srgbClr val="8EDBD4"/>
-            </a:solidFill>
-            <a:headEnd type="none" w="med" len="med"/>
-            <a:tailEnd type="triangle" w="med" len="med"/>
-          </a:ln>
-          <a:effectLst/>
-        </p:spPr>
-      </p:cxnSp>
-      <p:cxnSp>
-        <p:nvCxnSpPr>
-          <p:cNvPr id="8" name="C1-E27 arrow 6" descr="sci-ppt:o006"/>
-          <p:cNvCxnSpPr/>
-          <p:nvPr/>
-        </p:nvCxnSpPr>
-        <p:spPr>
-          <a:xfrm>
-            <a:off x="685800" y="3063240"/>
-            <a:ext cx="548640" cy="0"/>
-          </a:xfrm>
-          <a:prstGeom prst="line">
-            <a:avLst/>
-          </a:prstGeom>
-          <a:ln w="33020">
-            <a:solidFill>
-              <a:srgbClr val="8EDBD4"/>
-            </a:solidFill>
-            <a:headEnd type="none" w="med" len="med"/>
-            <a:tailEnd type="triangle" w="med" len="med"/>
-          </a:ln>
-          <a:effectLst/>
-        </p:spPr>
-      </p:cxnSp>
-      <p:cxnSp>
-        <p:nvCxnSpPr>
-          <p:cNvPr id="9" name="C1-E27 arrow 7" descr="sci-ppt:o007"/>
-          <p:cNvCxnSpPr/>
-          <p:nvPr/>
-        </p:nvCxnSpPr>
-        <p:spPr>
-          <a:xfrm>
-            <a:off x="3337560" y="3063240"/>
-            <a:ext cx="548640" cy="0"/>
-          </a:xfrm>
-          <a:prstGeom prst="line">
-            <a:avLst/>
-          </a:prstGeom>
-          <a:ln w="33020">
-            <a:solidFill>
-              <a:srgbClr val="8EDBD4"/>
-            </a:solidFill>
-            <a:headEnd type="none" w="med" len="med"/>
-            <a:tailEnd type="triangle" w="med" len="med"/>
-          </a:ln>
-          <a:effectLst/>
-        </p:spPr>
-      </p:cxnSp>
-      <p:cxnSp>
-        <p:nvCxnSpPr>
-          <p:cNvPr id="10" name="C1-E27 arrow 8" descr="sci-ppt:o008"/>
-          <p:cNvCxnSpPr/>
-          <p:nvPr/>
-        </p:nvCxnSpPr>
-        <p:spPr>
-          <a:xfrm>
-            <a:off x="685800" y="3520440"/>
-            <a:ext cx="548640" cy="0"/>
-          </a:xfrm>
-          <a:prstGeom prst="line">
-            <a:avLst/>
-          </a:prstGeom>
-          <a:ln w="33020">
-            <a:solidFill>
-              <a:srgbClr val="8EDBD4"/>
-            </a:solidFill>
-            <a:headEnd type="none" w="med" len="med"/>
-            <a:tailEnd type="triangle" w="med" len="med"/>
-          </a:ln>
-          <a:effectLst/>
-        </p:spPr>
-      </p:cxnSp>
-      <p:cxnSp>
-        <p:nvCxnSpPr>
-          <p:cNvPr id="11" name="C1-E27 arrow 9" descr="sci-ppt:o009"/>
-          <p:cNvCxnSpPr/>
-          <p:nvPr/>
-        </p:nvCxnSpPr>
-        <p:spPr>
-          <a:xfrm>
-            <a:off x="3337560" y="3520440"/>
-            <a:ext cx="548640" cy="0"/>
-          </a:xfrm>
-          <a:prstGeom prst="line">
-            <a:avLst/>
-          </a:prstGeom>
-          <a:ln w="33020">
-            <a:solidFill>
-              <a:srgbClr val="8EDBD4"/>
-            </a:solidFill>
-            <a:headEnd type="none" w="med" len="med"/>
-            <a:tailEnd type="triangle" w="med" len="med"/>
-          </a:ln>
-          <a:effectLst/>
-        </p:spPr>
-      </p:cxnSp>
-      <p:sp>
-        <p:nvSpPr>
-          <p:cNvPr id="12" name="C1-E27 text 10" descr="sci-ppt:o010"/>
-          <p:cNvSpPr txBox="1"/>
-          <p:nvPr/>
-        </p:nvSpPr>
-        <p:spPr>
-          <a:xfrm>
-            <a:off x="1371600" y="2834640"/>
-            <a:ext cx="1828800" cy="448563"/>
-          </a:xfrm>
-          <a:prstGeom prst="rect">
-            <a:avLst/>
-          </a:prstGeom>
-          <a:noFill/>
-          <a:effectLst/>
-        </p:spPr>
-        <p:txBody>
-          <a:bodyPr wrap="none" lIns="18288" rIns="18288" tIns="18288" bIns="18288" anchor="t">
-            <a:spAutoFit/>
-          </a:bodyPr>
-          <a:lstStyle/>
-          <a:p>
-            <a:pPr algn="ctr">
-              <a:spcAft>
-                <a:spcPts val="0"/>
-              </a:spcAft>
-            </a:pPr>
-            <a:r>
-              <a:rPr sz="1300" b="1" i="0">
-                <a:solidFill>
-                  <a:srgbClr val="E7F0F3"/>
-                </a:solidFill>
-                <a:latin typeface="Arial"/>
-              </a:rPr>
-              <a:t>volume in</a:t>
-            </a:r>
-          </a:p>
-          <a:p>
-            <a:pPr algn="ctr">
-              <a:spcAft>
-                <a:spcPts val="0"/>
-              </a:spcAft>
-            </a:pPr>
-            <a:r>
-              <a:rPr sz="1300" b="1" i="0">
-                <a:solidFill>
-                  <a:srgbClr val="E7F0F3"/>
-                </a:solidFill>
-                <a:latin typeface="Arial"/>
-              </a:rPr>
-              <a:t>= volume out</a:t>
-            </a:r>
-          </a:p>
-        </p:txBody>
-      </p:sp>
-      <p:sp>
-        <p:nvSpPr>
-          <p:cNvPr id="13" name="C1-E27 text 11" descr="sci-ppt:o011"/>
-          <p:cNvSpPr txBox="1"/>
-          <p:nvPr/>
-        </p:nvSpPr>
-        <p:spPr>
-          <a:xfrm>
-            <a:off x="502920" y="4251960"/>
-            <a:ext cx="3566160" cy="626745"/>
-          </a:xfrm>
-          <a:prstGeom prst="rect">
-            <a:avLst/>
-          </a:prstGeom>
-          <a:noFill/>
-          <a:effectLst/>
-        </p:spPr>
-        <p:txBody>
-          <a:bodyPr wrap="none" lIns="18288" rIns="18288" tIns="18288" bIns="18288" anchor="t">
-            <a:spAutoFit/>
-          </a:bodyPr>
-          <a:lstStyle/>
-          <a:p>
-            <a:pPr algn="l">
-              <a:spcAft>
-                <a:spcPts val="0"/>
-              </a:spcAft>
-            </a:pPr>
-            <a:r>
-              <a:rPr sz="1250" b="0" i="0">
-                <a:solidFill>
-                  <a:srgbClr val="E7F0F3"/>
-                </a:solidFill>
-                <a:latin typeface="Arial"/>
-              </a:rPr>
-              <a:t>The liquid does not compress: whatever</a:t>
-            </a:r>
-          </a:p>
-          <a:p>
-            <a:pPr algn="l">
-              <a:spcAft>
-                <a:spcPts val="0"/>
-              </a:spcAft>
-            </a:pPr>
-            <a:r>
-              <a:rPr sz="1250" b="0" i="0">
-                <a:solidFill>
-                  <a:srgbClr val="E7F0F3"/>
-                </a:solidFill>
-                <a:latin typeface="Arial"/>
-              </a:rPr>
-              <a:t>flows into a region flows out, so a moving</a:t>
-            </a:r>
-          </a:p>
-          <a:p>
-            <a:pPr algn="l">
-              <a:spcAft>
-                <a:spcPts val="0"/>
-              </a:spcAft>
-            </a:pPr>
-            <a:r>
-              <a:rPr sz="1250" b="0" i="0">
-                <a:solidFill>
-                  <a:srgbClr val="E7F0F3"/>
-                </a:solidFill>
-                <a:latin typeface="Arial"/>
-              </a:rPr>
-              <a:t>bubble wall must push liquid outward.</a:t>
-            </a:r>
-          </a:p>
-        </p:txBody>
-      </p:sp>
-      <p:sp>
-        <p:nvSpPr>
-          <p:cNvPr id="14" name="C1-E27 round_rect 12" descr="sci-ppt:o012"/>
-          <p:cNvSpPr/>
-          <p:nvPr/>
-        </p:nvSpPr>
-        <p:spPr>
-          <a:xfrm>
-            <a:off x="4480560" y="914400"/>
-            <a:ext cx="7360920" cy="4937760"/>
-          </a:xfrm>
-          <a:prstGeom prst="roundRect">
-            <a:avLst/>
-          </a:prstGeom>
-          <a:solidFill>
-            <a:srgbClr val="213E4B"/>
-          </a:solidFill>
-          <a:ln w="20320">
-            <a:solidFill>
-              <a:srgbClr val="8EDBD4"/>
-            </a:solidFill>
-          </a:ln>
-          <a:effectLst/>
-        </p:spPr>
-        <p:txBody>
-          <a:bodyPr rtlCol="0" anchor="ctr"/>
-          <a:lstStyle/>
-          <a:p>
-            <a:pPr algn="ctr"/>
-          </a:p>
-        </p:txBody>
-      </p:sp>
-      <p:sp>
-        <p:nvSpPr>
-          <p:cNvPr id="15" name="C1-E27 text 13" descr="sci-ppt:o013"/>
-          <p:cNvSpPr txBox="1"/>
-          <p:nvPr/>
-        </p:nvSpPr>
-        <p:spPr>
-          <a:xfrm>
-            <a:off x="4590288" y="969264"/>
-            <a:ext cx="7141464" cy="254889"/>
-          </a:xfrm>
-          <a:prstGeom prst="rect">
-            <a:avLst/>
-          </a:prstGeom>
-          <a:noFill/>
-          <a:effectLst/>
-        </p:spPr>
-        <p:txBody>
-          <a:bodyPr wrap="none" lIns="18288" rIns="18288" tIns="18288" bIns="18288" anchor="t">
-            <a:spAutoFit/>
-          </a:bodyPr>
-          <a:lstStyle/>
-          <a:p>
-            <a:pPr algn="l">
-              <a:spcAft>
-                <a:spcPts val="0"/>
-              </a:spcAft>
-            </a:pPr>
-            <a:r>
-              <a:rPr sz="1350" b="1" i="0">
-                <a:solidFill>
-                  <a:srgbClr val="8EDBD4"/>
-                </a:solidFill>
-                <a:latin typeface="Arial"/>
-              </a:rPr>
-              <a:t>Momentum: ρ Du/Dt = −∇p + μ∇²u</a:t>
-            </a:r>
-          </a:p>
-        </p:txBody>
-      </p:sp>
-      <p:cxnSp>
-        <p:nvCxnSpPr>
-          <p:cNvPr id="16" name="C1-E27 arrow 14" descr="sci-ppt:o014"/>
-          <p:cNvCxnSpPr/>
-          <p:nvPr/>
-        </p:nvCxnSpPr>
-        <p:spPr>
-          <a:xfrm flipV="1">
-            <a:off x="5394960" y="3474720"/>
-            <a:ext cx="2743200" cy="914400"/>
-          </a:xfrm>
-          <a:prstGeom prst="line">
-            <a:avLst/>
-          </a:prstGeom>
-          <a:ln w="44450">
-            <a:solidFill>
-              <a:srgbClr val="8EDBD4"/>
-            </a:solidFill>
-            <a:headEnd type="none" w="med" len="med"/>
-            <a:tailEnd type="triangle" w="med" len="med"/>
-          </a:ln>
-          <a:effectLst/>
-        </p:spPr>
-      </p:cxnSp>
-      <p:cxnSp>
-        <p:nvCxnSpPr>
-          <p:cNvPr id="17" name="C1-E27 arrow 15" descr="sci-ppt:o015"/>
-          <p:cNvCxnSpPr/>
-          <p:nvPr/>
-        </p:nvCxnSpPr>
-        <p:spPr>
-          <a:xfrm>
-            <a:off x="5394960" y="4389120"/>
-            <a:ext cx="2743200" cy="0"/>
+          <a:xfrm flipH="1">
+            <a:off x="3080264" y="2838618"/>
+            <a:ext cx="636678" cy="445806"/>
           </a:xfrm>
           <a:prstGeom prst="line">
             <a:avLst/>
@@ -3634,19 +3298,19 @@
       </p:cxnSp>
       <p:cxnSp>
         <p:nvCxnSpPr>
-          <p:cNvPr id="18" name="C1-E27 arrow 16" descr="sci-ppt:o016"/>
+          <p:cNvPr id="8" name="C1-E27 arrow 6" descr="sci-ppt:o006"/>
           <p:cNvCxnSpPr/>
           <p:nvPr/>
         </p:nvCxnSpPr>
         <p:spPr>
-          <a:xfrm flipV="1">
-            <a:off x="8138160" y="3474720"/>
-            <a:ext cx="0" cy="914400"/>
+          <a:xfrm flipH="1" flipV="1">
+            <a:off x="3349807" y="2314295"/>
+            <a:ext cx="367135" cy="524323"/>
           </a:xfrm>
           <a:prstGeom prst="line">
             <a:avLst/>
           </a:prstGeom>
-          <a:ln w="38100">
+          <a:ln w="30480">
             <a:solidFill>
               <a:srgbClr val="7FC8F8"/>
             </a:solidFill>
@@ -3656,88 +3320,112 @@
           <a:effectLst/>
         </p:spPr>
       </p:cxnSp>
-      <p:sp>
-        <p:nvSpPr>
-          <p:cNvPr id="19" name="C1-E27 ellipse 17" descr="sci-ppt:o017"/>
-          <p:cNvSpPr/>
+      <p:cxnSp>
+        <p:nvCxnSpPr>
+          <p:cNvPr id="9" name="C1-E27 arrow 7" descr="sci-ppt:o007"/>
+          <p:cNvCxnSpPr/>
           <p:nvPr/>
-        </p:nvSpPr>
-        <p:spPr>
-          <a:xfrm>
-            <a:off x="5321808" y="4315968"/>
-            <a:ext cx="146304" cy="146304"/>
-          </a:xfrm>
-          <a:prstGeom prst="ellipse">
+        </p:nvCxnSpPr>
+        <p:spPr>
+          <a:xfrm>
+            <a:off x="2240825" y="2443093"/>
+            <a:ext cx="328476" cy="704419"/>
+          </a:xfrm>
+          <a:prstGeom prst="line">
             <a:avLst/>
           </a:prstGeom>
-          <a:solidFill>
-            <a:srgbClr val="E7F0F3"/>
-          </a:solidFill>
-          <a:ln w="12700">
+          <a:ln w="38100">
             <a:solidFill>
-              <a:srgbClr val="E7F0F3"/>
+              <a:srgbClr val="F28BA0"/>
             </a:solidFill>
+            <a:headEnd type="none" w="med" len="med"/>
+            <a:tailEnd type="triangle" w="med" len="med"/>
           </a:ln>
           <a:effectLst/>
         </p:spPr>
-        <p:txBody>
-          <a:bodyPr rtlCol="0" anchor="ctr"/>
-          <a:lstStyle/>
-          <a:p>
-            <a:pPr algn="ctr"/>
-          </a:p>
-        </p:txBody>
-      </p:sp>
-      <p:sp>
-        <p:nvSpPr>
-          <p:cNvPr id="20" name="C1-E27 text 18" descr="sci-ppt:o018"/>
+      </p:cxnSp>
+      <p:cxnSp>
+        <p:nvCxnSpPr>
+          <p:cNvPr id="10" name="C1-E27 arrow 8" descr="sci-ppt:o008"/>
+          <p:cNvCxnSpPr/>
+          <p:nvPr/>
+        </p:nvCxnSpPr>
+        <p:spPr>
+          <a:xfrm flipH="1">
+            <a:off x="1660715" y="2443093"/>
+            <a:ext cx="580110" cy="270510"/>
+          </a:xfrm>
+          <a:prstGeom prst="line">
+            <a:avLst/>
+          </a:prstGeom>
+          <a:ln w="30480">
+            <a:solidFill>
+              <a:srgbClr val="7FC8F8"/>
+            </a:solidFill>
+            <a:headEnd type="none" w="med" len="med"/>
+            <a:tailEnd type="triangle" w="med" len="med"/>
+          </a:ln>
+          <a:effectLst/>
+        </p:spPr>
+      </p:cxnSp>
+      <p:cxnSp>
+        <p:nvCxnSpPr>
+          <p:cNvPr id="11" name="C1-E27 arrow 9" descr="sci-ppt:o009"/>
+          <p:cNvCxnSpPr/>
+          <p:nvPr/>
+        </p:nvCxnSpPr>
+        <p:spPr>
+          <a:xfrm flipV="1">
+            <a:off x="1626168" y="3661174"/>
+            <a:ext cx="730367" cy="265832"/>
+          </a:xfrm>
+          <a:prstGeom prst="line">
+            <a:avLst/>
+          </a:prstGeom>
+          <a:ln w="38100">
+            <a:solidFill>
+              <a:srgbClr val="F28BA0"/>
+            </a:solidFill>
+            <a:headEnd type="none" w="med" len="med"/>
+            <a:tailEnd type="triangle" w="med" len="med"/>
+          </a:ln>
+          <a:effectLst/>
+        </p:spPr>
+      </p:cxnSp>
+      <p:cxnSp>
+        <p:nvCxnSpPr>
+          <p:cNvPr id="12" name="C1-E27 arrow 10" descr="sci-ppt:o010"/>
+          <p:cNvCxnSpPr/>
+          <p:nvPr/>
+        </p:nvCxnSpPr>
+        <p:spPr>
+          <a:xfrm>
+            <a:off x="1626168" y="3927006"/>
+            <a:ext cx="218920" cy="601478"/>
+          </a:xfrm>
+          <a:prstGeom prst="line">
+            <a:avLst/>
+          </a:prstGeom>
+          <a:ln w="30480">
+            <a:solidFill>
+              <a:srgbClr val="7FC8F8"/>
+            </a:solidFill>
+            <a:headEnd type="none" w="med" len="med"/>
+            <a:tailEnd type="triangle" w="med" len="med"/>
+          </a:ln>
+          <a:effectLst/>
+        </p:spPr>
+      </p:cxnSp>
+      <p:sp>
+        <p:nvSpPr>
+          <p:cNvPr id="13" name="C1-E27 text 11" descr="sci-ppt:o011"/>
           <p:cNvSpPr txBox="1"/>
           <p:nvPr/>
         </p:nvSpPr>
         <p:spPr>
           <a:xfrm>
-            <a:off x="8275320" y="3108960"/>
-            <a:ext cx="3291840" cy="247142"/>
-          </a:xfrm>
-          <a:prstGeom prst="rect">
-            <a:avLst/>
-          </a:prstGeom>
-          <a:noFill/>
-          <a:effectLst/>
-        </p:spPr>
-        <p:txBody>
-          <a:bodyPr wrap="none" lIns="18288" rIns="18288" tIns="18288" bIns="18288" anchor="t">
-            <a:spAutoFit/>
-          </a:bodyPr>
-          <a:lstStyle/>
-          <a:p>
-            <a:pPr algn="l">
-              <a:spcAft>
-                <a:spcPts val="0"/>
-              </a:spcAft>
-            </a:pPr>
-            <a:r>
-              <a:rPr sz="1300" b="1" i="0">
-                <a:solidFill>
-                  <a:srgbClr val="8EDBD4"/>
-                </a:solidFill>
-                <a:latin typeface="Arial"/>
-              </a:rPr>
-              <a:t>ρ Du/Dt (inertia)</a:t>
-            </a:r>
-          </a:p>
-        </p:txBody>
-      </p:sp>
-      <p:sp>
-        <p:nvSpPr>
-          <p:cNvPr id="21" name="C1-E27 text 19" descr="sci-ppt:o019"/>
-          <p:cNvSpPr txBox="1"/>
-          <p:nvPr/>
-        </p:nvSpPr>
-        <p:spPr>
-          <a:xfrm>
-            <a:off x="6309360" y="4462272"/>
-            <a:ext cx="2743200" cy="247142"/>
+            <a:off x="3749039" y="1645920"/>
+            <a:ext cx="2377440" cy="247142"/>
           </a:xfrm>
           <a:prstGeom prst="rect">
             <a:avLst/>
@@ -3763,21 +3451,21 @@
                 </a:solidFill>
                 <a:latin typeface="Arial"/>
               </a:rPr>
-              <a:t>−∇p (pressure gradient)</a:t>
-            </a:r>
-          </a:p>
-        </p:txBody>
-      </p:sp>
-      <p:sp>
-        <p:nvSpPr>
-          <p:cNvPr id="22" name="C1-E27 text 20" descr="sci-ppt:o020"/>
+              <a:t>n: liquid → gas</a:t>
+            </a:r>
+          </a:p>
+        </p:txBody>
+      </p:sp>
+      <p:sp>
+        <p:nvSpPr>
+          <p:cNvPr id="14" name="C1-E27 text 12" descr="sci-ppt:o012"/>
           <p:cNvSpPr txBox="1"/>
           <p:nvPr/>
         </p:nvSpPr>
         <p:spPr>
           <a:xfrm>
-            <a:off x="8275320" y="3840480"/>
-            <a:ext cx="3291840" cy="247142"/>
+            <a:off x="4023360" y="2194560"/>
+            <a:ext cx="2377440" cy="247142"/>
           </a:xfrm>
           <a:prstGeom prst="rect">
             <a:avLst/>
@@ -3803,21 +3491,21 @@
                 </a:solidFill>
                 <a:latin typeface="Arial"/>
               </a:rPr>
-              <a:t>μ∇²u (viscous diffusion)</a:t>
-            </a:r>
-          </a:p>
-        </p:txBody>
-      </p:sp>
-      <p:sp>
-        <p:nvSpPr>
-          <p:cNvPr id="23" name="C1-E27 text 21" descr="sci-ppt:o021"/>
+              <a:t>s: tangent</a:t>
+            </a:r>
+          </a:p>
+        </p:txBody>
+      </p:sp>
+      <p:sp>
+        <p:nvSpPr>
+          <p:cNvPr id="15" name="C1-E27 text 13" descr="sci-ppt:o013"/>
           <p:cNvSpPr txBox="1"/>
           <p:nvPr/>
         </p:nvSpPr>
         <p:spPr>
           <a:xfrm>
-            <a:off x="4663440" y="1371600"/>
-            <a:ext cx="7040880" cy="448563"/>
+            <a:off x="502920" y="5257800"/>
+            <a:ext cx="4663440" cy="433070"/>
           </a:xfrm>
           <a:prstGeom prst="rect">
             <a:avLst/>
@@ -3837,13 +3525,13 @@
               </a:spcAft>
             </a:pPr>
             <a:r>
-              <a:rPr sz="1300" b="0" i="0">
+              <a:rPr sz="1250" b="0" i="0">
                 <a:solidFill>
                   <a:srgbClr val="E7F0F3"/>
                 </a:solidFill>
                 <a:latin typeface="Arial"/>
               </a:rPr>
-              <a:t>Per unit volume, the mass-times-acceleration vector equals the sum of the</a:t>
+              <a:t>For a bubble the normal points inward, so the sphere</a:t>
             </a:r>
           </a:p>
           <a:p>
@@ -3853,27 +3541,27 @@
               </a:spcAft>
             </a:pPr>
             <a:r>
-              <a:rPr sz="1300" b="0" i="0">
+              <a:rPr sz="1250" b="0" i="0">
                 <a:solidFill>
                   <a:srgbClr val="E7F0F3"/>
                 </a:solidFill>
                 <a:latin typeface="Arial"/>
               </a:rPr>
-              <a:t>forces:</a:t>
-            </a:r>
-          </a:p>
-        </p:txBody>
-      </p:sp>
-      <p:sp>
-        <p:nvSpPr>
-          <p:cNvPr id="24" name="C1-E27 text 22" descr="sci-ppt:o022"/>
+              <a:t>curvature is κ = −2/R.</a:t>
+            </a:r>
+          </a:p>
+        </p:txBody>
+      </p:sp>
+      <p:sp>
+        <p:nvSpPr>
+          <p:cNvPr id="16" name="C1-E27 text 14" descr="sci-ppt:o014"/>
           <p:cNvSpPr txBox="1"/>
           <p:nvPr/>
         </p:nvSpPr>
         <p:spPr>
           <a:xfrm>
-            <a:off x="4663440" y="1874519"/>
-            <a:ext cx="7040880" cy="626745"/>
+            <a:off x="5577840" y="914400"/>
+            <a:ext cx="6217920" cy="262636"/>
           </a:xfrm>
           <a:prstGeom prst="rect">
             <a:avLst/>
@@ -3893,15 +3581,223 @@
               </a:spcAft>
             </a:pPr>
             <a:r>
-              <a:rPr sz="1250" b="0" i="0">
+              <a:rPr sz="1400" b="1" i="0">
+                <a:solidFill>
+                  <a:srgbClr val="8EDBD4"/>
+                </a:solidFill>
+                <a:latin typeface="Arial"/>
+              </a:rPr>
+              <a:t>Three conditions on the interface Γ</a:t>
+            </a:r>
+          </a:p>
+        </p:txBody>
+      </p:sp>
+      <p:sp>
+        <p:nvSpPr>
+          <p:cNvPr id="17" name="C1-E27 round_rect 15" descr="sci-ppt:o015"/>
+          <p:cNvSpPr/>
+          <p:nvPr/>
+        </p:nvSpPr>
+        <p:spPr>
+          <a:xfrm>
+            <a:off x="5577840" y="1417320"/>
+            <a:ext cx="6263640" cy="1325880"/>
+          </a:xfrm>
+          <a:prstGeom prst="roundRect">
+            <a:avLst/>
+          </a:prstGeom>
+          <a:solidFill>
+            <a:srgbClr val="213E4B"/>
+          </a:solidFill>
+          <a:ln w="20320">
+            <a:solidFill>
+              <a:srgbClr val="B4C7D2"/>
+            </a:solidFill>
+          </a:ln>
+          <a:effectLst/>
+        </p:spPr>
+        <p:txBody>
+          <a:bodyPr rtlCol="0" anchor="ctr"/>
+          <a:lstStyle/>
+          <a:p>
+            <a:pPr algn="ctr"/>
+          </a:p>
+        </p:txBody>
+      </p:sp>
+      <p:sp>
+        <p:nvSpPr>
+          <p:cNvPr id="18" name="C1-E27 text 16" descr="sci-ppt:o016"/>
+          <p:cNvSpPr txBox="1"/>
+          <p:nvPr/>
+        </p:nvSpPr>
+        <p:spPr>
+          <a:xfrm>
+            <a:off x="5715000" y="1472184"/>
+            <a:ext cx="5943600" cy="247142"/>
+          </a:xfrm>
+          <a:prstGeom prst="rect">
+            <a:avLst/>
+          </a:prstGeom>
+          <a:noFill/>
+          <a:effectLst/>
+        </p:spPr>
+        <p:txBody>
+          <a:bodyPr wrap="none" lIns="18288" rIns="18288" tIns="18288" bIns="18288" anchor="t">
+            <a:spAutoFit/>
+          </a:bodyPr>
+          <a:lstStyle/>
+          <a:p>
+            <a:pPr algn="l">
+              <a:spcAft>
+                <a:spcPts val="0"/>
+              </a:spcAft>
+            </a:pPr>
+            <a:r>
+              <a:rPr sz="1300" b="1" i="0">
+                <a:solidFill>
+                  <a:srgbClr val="F2B880"/>
+                </a:solidFill>
+                <a:latin typeface="Arial"/>
+              </a:rPr>
+              <a:t>Kinematic</a:t>
+            </a:r>
+          </a:p>
+        </p:txBody>
+      </p:sp>
+      <p:sp>
+        <p:nvSpPr>
+          <p:cNvPr id="19" name="C1-E27 text 17" descr="sci-ppt:o017"/>
+          <p:cNvSpPr txBox="1"/>
+          <p:nvPr/>
+        </p:nvSpPr>
+        <p:spPr>
+          <a:xfrm>
+            <a:off x="5715000" y="1828800"/>
+            <a:ext cx="5943600" cy="262636"/>
+          </a:xfrm>
+          <a:prstGeom prst="rect">
+            <a:avLst/>
+          </a:prstGeom>
+          <a:noFill/>
+          <a:effectLst/>
+        </p:spPr>
+        <p:txBody>
+          <a:bodyPr wrap="none" lIns="18288" rIns="18288" tIns="18288" bIns="18288" anchor="t">
+            <a:spAutoFit/>
+          </a:bodyPr>
+          <a:lstStyle/>
+          <a:p>
+            <a:pPr algn="l">
+              <a:spcAft>
+                <a:spcPts val="0"/>
+              </a:spcAft>
+            </a:pPr>
+            <a:r>
+              <a:rPr sz="1400" b="1" i="0">
+                <a:solidFill>
+                  <a:srgbClr val="E7F0F3"/>
+                </a:solidFill>
+                <a:latin typeface="Arial"/>
+              </a:rPr>
+              <a:t>Vₙ = u · n</a:t>
+            </a:r>
+          </a:p>
+        </p:txBody>
+      </p:sp>
+      <p:sp>
+        <p:nvSpPr>
+          <p:cNvPr id="20" name="C1-E27 text 18" descr="sci-ppt:o018"/>
+          <p:cNvSpPr txBox="1"/>
+          <p:nvPr/>
+        </p:nvSpPr>
+        <p:spPr>
+          <a:xfrm>
+            <a:off x="5715000" y="2286000"/>
+            <a:ext cx="5943600" cy="231648"/>
+          </a:xfrm>
+          <a:prstGeom prst="rect">
+            <a:avLst/>
+          </a:prstGeom>
+          <a:noFill/>
+          <a:effectLst/>
+        </p:spPr>
+        <p:txBody>
+          <a:bodyPr wrap="none" lIns="18288" rIns="18288" tIns="18288" bIns="18288" anchor="t">
+            <a:spAutoFit/>
+          </a:bodyPr>
+          <a:lstStyle/>
+          <a:p>
+            <a:pPr algn="l">
+              <a:spcAft>
+                <a:spcPts val="0"/>
+              </a:spcAft>
+            </a:pPr>
+            <a:r>
+              <a:rPr sz="1200" b="0" i="0">
                 <a:solidFill>
                   <a:srgbClr val="B4C7D2"/>
                 </a:solidFill>
                 <a:latin typeface="Arial"/>
               </a:rPr>
-              <a:t>The same fixed set of equations governs every later spatial calculation: the</a:t>
-            </a:r>
-          </a:p>
+              <a:t>the surface moves with the liquid normal to itself</a:t>
+            </a:r>
+          </a:p>
+        </p:txBody>
+      </p:sp>
+      <p:sp>
+        <p:nvSpPr>
+          <p:cNvPr id="21" name="C1-E27 round_rect 19" descr="sci-ppt:o019"/>
+          <p:cNvSpPr/>
+          <p:nvPr/>
+        </p:nvSpPr>
+        <p:spPr>
+          <a:xfrm>
+            <a:off x="5577840" y="2880360"/>
+            <a:ext cx="6263640" cy="1325880"/>
+          </a:xfrm>
+          <a:prstGeom prst="roundRect">
+            <a:avLst/>
+          </a:prstGeom>
+          <a:solidFill>
+            <a:srgbClr val="213E4B"/>
+          </a:solidFill>
+          <a:ln w="20320">
+            <a:solidFill>
+              <a:srgbClr val="B4C7D2"/>
+            </a:solidFill>
+          </a:ln>
+          <a:effectLst/>
+        </p:spPr>
+        <p:txBody>
+          <a:bodyPr rtlCol="0" anchor="ctr"/>
+          <a:lstStyle/>
+          <a:p>
+            <a:pPr algn="ctr"/>
+          </a:p>
+        </p:txBody>
+      </p:sp>
+      <p:sp>
+        <p:nvSpPr>
+          <p:cNvPr id="22" name="C1-E27 text 20" descr="sci-ppt:o020"/>
+          <p:cNvSpPr txBox="1"/>
+          <p:nvPr/>
+        </p:nvSpPr>
+        <p:spPr>
+          <a:xfrm>
+            <a:off x="5715000" y="2935224"/>
+            <a:ext cx="5943600" cy="247142"/>
+          </a:xfrm>
+          <a:prstGeom prst="rect">
+            <a:avLst/>
+          </a:prstGeom>
+          <a:noFill/>
+          <a:effectLst/>
+        </p:spPr>
+        <p:txBody>
+          <a:bodyPr wrap="none" lIns="18288" rIns="18288" tIns="18288" bIns="18288" anchor="t">
+            <a:spAutoFit/>
+          </a:bodyPr>
+          <a:lstStyle/>
           <a:p>
             <a:pPr algn="l">
               <a:spcAft>
@@ -3909,15 +3805,151 @@
               </a:spcAft>
             </a:pPr>
             <a:r>
-              <a:rPr sz="1250" b="0" i="0">
+              <a:rPr sz="1300" b="1" i="0">
+                <a:solidFill>
+                  <a:srgbClr val="F2B880"/>
+                </a:solidFill>
+                <a:latin typeface="Arial"/>
+              </a:rPr>
+              <a:t>Normal stress</a:t>
+            </a:r>
+          </a:p>
+        </p:txBody>
+      </p:sp>
+      <p:sp>
+        <p:nvSpPr>
+          <p:cNvPr id="23" name="C1-E27 text 21" descr="sci-ppt:o021"/>
+          <p:cNvSpPr txBox="1"/>
+          <p:nvPr/>
+        </p:nvSpPr>
+        <p:spPr>
+          <a:xfrm>
+            <a:off x="5715000" y="3291840"/>
+            <a:ext cx="5943600" cy="262636"/>
+          </a:xfrm>
+          <a:prstGeom prst="rect">
+            <a:avLst/>
+          </a:prstGeom>
+          <a:noFill/>
+          <a:effectLst/>
+        </p:spPr>
+        <p:txBody>
+          <a:bodyPr wrap="none" lIns="18288" rIns="18288" tIns="18288" bIns="18288" anchor="t">
+            <a:spAutoFit/>
+          </a:bodyPr>
+          <a:lstStyle/>
+          <a:p>
+            <a:pPr algn="l">
+              <a:spcAft>
+                <a:spcPts val="0"/>
+              </a:spcAft>
+            </a:pPr>
+            <a:r>
+              <a:rPr sz="1400" b="1" i="0">
+                <a:solidFill>
+                  <a:srgbClr val="E7F0F3"/>
+                </a:solidFill>
+                <a:latin typeface="Arial"/>
+              </a:rPr>
+              <a:t>pₗ = p_b + σκ + 2μ n·D·n</a:t>
+            </a:r>
+          </a:p>
+        </p:txBody>
+      </p:sp>
+      <p:sp>
+        <p:nvSpPr>
+          <p:cNvPr id="24" name="C1-E27 text 22" descr="sci-ppt:o022"/>
+          <p:cNvSpPr txBox="1"/>
+          <p:nvPr/>
+        </p:nvSpPr>
+        <p:spPr>
+          <a:xfrm>
+            <a:off x="5715000" y="3749040"/>
+            <a:ext cx="5943600" cy="231648"/>
+          </a:xfrm>
+          <a:prstGeom prst="rect">
+            <a:avLst/>
+          </a:prstGeom>
+          <a:noFill/>
+          <a:effectLst/>
+        </p:spPr>
+        <p:txBody>
+          <a:bodyPr wrap="none" lIns="18288" rIns="18288" tIns="18288" bIns="18288" anchor="t">
+            <a:spAutoFit/>
+          </a:bodyPr>
+          <a:lstStyle/>
+          <a:p>
+            <a:pPr algn="l">
+              <a:spcAft>
+                <a:spcPts val="0"/>
+              </a:spcAft>
+            </a:pPr>
+            <a:r>
+              <a:rPr sz="1200" b="0" i="0">
                 <a:solidFill>
                   <a:srgbClr val="B4C7D2"/>
                 </a:solidFill>
                 <a:latin typeface="Arial"/>
               </a:rPr>
-              <a:t>pressure field supplies the push, the viscous term damps it, and the convective</a:t>
-            </a:r>
-          </a:p>
+              <a:t>σκ = −2σ/R for a sphere</a:t>
+            </a:r>
+          </a:p>
+        </p:txBody>
+      </p:sp>
+      <p:sp>
+        <p:nvSpPr>
+          <p:cNvPr id="25" name="C1-E27 round_rect 23" descr="sci-ppt:o023"/>
+          <p:cNvSpPr/>
+          <p:nvPr/>
+        </p:nvSpPr>
+        <p:spPr>
+          <a:xfrm>
+            <a:off x="5577840" y="4343400"/>
+            <a:ext cx="6263640" cy="1325880"/>
+          </a:xfrm>
+          <a:prstGeom prst="roundRect">
+            <a:avLst/>
+          </a:prstGeom>
+          <a:solidFill>
+            <a:srgbClr val="213E4B"/>
+          </a:solidFill>
+          <a:ln w="20320">
+            <a:solidFill>
+              <a:srgbClr val="B4C7D2"/>
+            </a:solidFill>
+          </a:ln>
+          <a:effectLst/>
+        </p:spPr>
+        <p:txBody>
+          <a:bodyPr rtlCol="0" anchor="ctr"/>
+          <a:lstStyle/>
+          <a:p>
+            <a:pPr algn="ctr"/>
+          </a:p>
+        </p:txBody>
+      </p:sp>
+      <p:sp>
+        <p:nvSpPr>
+          <p:cNvPr id="26" name="C1-E27 text 24" descr="sci-ppt:o024"/>
+          <p:cNvSpPr txBox="1"/>
+          <p:nvPr/>
+        </p:nvSpPr>
+        <p:spPr>
+          <a:xfrm>
+            <a:off x="5715000" y="4398264"/>
+            <a:ext cx="5943600" cy="247142"/>
+          </a:xfrm>
+          <a:prstGeom prst="rect">
+            <a:avLst/>
+          </a:prstGeom>
+          <a:noFill/>
+          <a:effectLst/>
+        </p:spPr>
+        <p:txBody>
+          <a:bodyPr wrap="none" lIns="18288" rIns="18288" tIns="18288" bIns="18288" anchor="t">
+            <a:spAutoFit/>
+          </a:bodyPr>
+          <a:lstStyle/>
           <a:p>
             <a:pPr algn="l">
               <a:spcAft>
@@ -3925,27 +3957,107 @@
               </a:spcAft>
             </a:pPr>
             <a:r>
-              <a:rPr sz="1250" b="0" i="0">
+              <a:rPr sz="1300" b="1" i="0">
+                <a:solidFill>
+                  <a:srgbClr val="F2B880"/>
+                </a:solidFill>
+                <a:latin typeface="Arial"/>
+              </a:rPr>
+              <a:t>Tangential stress</a:t>
+            </a:r>
+          </a:p>
+        </p:txBody>
+      </p:sp>
+      <p:sp>
+        <p:nvSpPr>
+          <p:cNvPr id="27" name="C1-E27 text 25" descr="sci-ppt:o025"/>
+          <p:cNvSpPr txBox="1"/>
+          <p:nvPr/>
+        </p:nvSpPr>
+        <p:spPr>
+          <a:xfrm>
+            <a:off x="5715000" y="4754880"/>
+            <a:ext cx="5943600" cy="262636"/>
+          </a:xfrm>
+          <a:prstGeom prst="rect">
+            <a:avLst/>
+          </a:prstGeom>
+          <a:noFill/>
+          <a:effectLst/>
+        </p:spPr>
+        <p:txBody>
+          <a:bodyPr wrap="none" lIns="18288" rIns="18288" tIns="18288" bIns="18288" anchor="t">
+            <a:spAutoFit/>
+          </a:bodyPr>
+          <a:lstStyle/>
+          <a:p>
+            <a:pPr algn="l">
+              <a:spcAft>
+                <a:spcPts val="0"/>
+              </a:spcAft>
+            </a:pPr>
+            <a:r>
+              <a:rPr sz="1400" b="1" i="0">
+                <a:solidFill>
+                  <a:srgbClr val="E7F0F3"/>
+                </a:solidFill>
+                <a:latin typeface="Arial"/>
+              </a:rPr>
+              <a:t>2μ s·D·n = 0</a:t>
+            </a:r>
+          </a:p>
+        </p:txBody>
+      </p:sp>
+      <p:sp>
+        <p:nvSpPr>
+          <p:cNvPr id="28" name="C1-E27 text 26" descr="sci-ppt:o026"/>
+          <p:cNvSpPr txBox="1"/>
+          <p:nvPr/>
+        </p:nvSpPr>
+        <p:spPr>
+          <a:xfrm>
+            <a:off x="5715000" y="5212080"/>
+            <a:ext cx="5943600" cy="231648"/>
+          </a:xfrm>
+          <a:prstGeom prst="rect">
+            <a:avLst/>
+          </a:prstGeom>
+          <a:noFill/>
+          <a:effectLst/>
+        </p:spPr>
+        <p:txBody>
+          <a:bodyPr wrap="none" lIns="18288" rIns="18288" tIns="18288" bIns="18288" anchor="t">
+            <a:spAutoFit/>
+          </a:bodyPr>
+          <a:lstStyle/>
+          <a:p>
+            <a:pPr algn="l">
+              <a:spcAft>
+                <a:spcPts val="0"/>
+              </a:spcAft>
+            </a:pPr>
+            <a:r>
+              <a:rPr sz="1200" b="0" i="0">
                 <a:solidFill>
                   <a:srgbClr val="B4C7D2"/>
                 </a:solidFill>
                 <a:latin typeface="Arial"/>
               </a:rPr>
-              <a:t>part u·∇u makes the flow nonlinear.</a:t>
-            </a:r>
-          </a:p>
-        </p:txBody>
-      </p:sp>
-      <p:sp>
-        <p:nvSpPr>
-          <p:cNvPr id="25" name="C1-E27 text 23" descr="sci-ppt:o023"/>
+              <a:t>gas cannot support shear</a:t>
+            </a:r>
+          </a:p>
+        </p:txBody>
+      </p:sp>
+      <p:sp>
+        <p:nvSpPr>
+          <p:cNvPr id="29" name="C1-E27 text 27" descr="sci-ppt:o027"/>
           <p:cNvSpPr txBox="1"/>
           <p:nvPr/>
         </p:nvSpPr>
         <p:spPr>
           <a:xfrm>
-            <a:off x="4663440" y="2834640"/>
-            <a:ext cx="7040880" cy="262636"/>
+            <a:off x="5577840" y="5806440"/>
+            <a:ext cx="6217920" cy="433070"/>
           </a:xfrm>
           <a:prstGeom prst="rect">
             <a:avLst/>
@@ -3965,20 +4077,36 @@
               </a:spcAft>
             </a:pPr>
             <a:r>
-              <a:rPr sz="1400" b="1" i="0">
+              <a:rPr sz="1250" b="0" i="0">
                 <a:solidFill>
-                  <a:srgbClr val="F2B880"/>
+                  <a:srgbClr val="E7F0F3"/>
                 </a:solidFill>
                 <a:latin typeface="Arial"/>
               </a:rPr>
-              <a:t>Du/Dt = ∂u/∂t + (u·∇)u</a:t>
-            </a:r>
-          </a:p>
-        </p:txBody>
-      </p:sp>
-      <p:sp>
-        <p:nvSpPr>
-          <p:cNvPr id="26" name="C1-E27 text 24" descr="sci-ppt:o024"/>
+              <a:t>One sign convention for n, κ and D is required, or the terms cancel</a:t>
+            </a:r>
+          </a:p>
+          <a:p>
+            <a:pPr algn="l">
+              <a:spcAft>
+                <a:spcPts val="0"/>
+              </a:spcAft>
+            </a:pPr>
+            <a:r>
+              <a:rPr sz="1250" b="0" i="0">
+                <a:solidFill>
+                  <a:srgbClr val="E7F0F3"/>
+                </a:solidFill>
+                <a:latin typeface="Arial"/>
+              </a:rPr>
+              <a:t>wrongly.</a:t>
+            </a:r>
+          </a:p>
+        </p:txBody>
+      </p:sp>
+      <p:sp>
+        <p:nvSpPr>
+          <p:cNvPr id="30" name="C1-E27 text 28" descr="sci-ppt:o028"/>
           <p:cNvSpPr txBox="1"/>
           <p:nvPr/>
         </p:nvSpPr>
@@ -4011,7 +4139,7 @@
                 </a:solidFill>
                 <a:latin typeface="Arial"/>
               </a:rPr>
-              <a:t>Vectors are schematic; constant ρ and μ.</a:t>
+              <a:t>D = ½(∇u + ∇uᵀ) is the strain-rate tensor (Eq. C1-E27).</a:t>
             </a:r>
           </a:p>
         </p:txBody>
